--- a/neerlandais1/powerpoints/Module_6_Tweeklanken.pptx
+++ b/neerlandais1/powerpoints/Module_6_Tweeklanken.pptx
@@ -131,19 +131,19 @@
   <p:extLst>
     <p:ext uri="{521415D9-36F7-43E2-AB2F-B90AF26B5E84}">
       <p14:sectionLst xmlns:p14="http://schemas.microsoft.com/office/powerpoint/2010/main">
-        <p14:section name="Ouverture" id="{c1f946b4-fb28-421d-94b4-f26914c16810}">
+        <p14:section name="Ouverture" id="{11d6150b-8985-1a71-c583-17166423d9a7}">
           <p14:sldIdLst>
             <p14:sldId id="256"/>
           </p14:sldIdLst>
         </p14:section>
-        <p14:section name="Découvrir" id="{e7474b64-04ed-2577-f81b-af1269774362}">
+        <p14:section name="Découvrir" id="{e046edac-dc46-d181-9f1b-a0725c2b09d4}">
           <p14:sldIdLst>
             <p14:sldId id="257"/>
             <p14:sldId id="258"/>
             <p14:sldId id="259"/>
           </p14:sldIdLst>
         </p14:section>
-        <p14:section name="Comprendre" id="{fe9137b4-99a2-764a-fb2a-891a80dbfae8}">
+        <p14:section name="Comprendre" id="{827643fb-ee84-9b62-5f17-abf1cc59637f}">
           <p14:sldIdLst>
             <p14:sldId id="260"/>
             <p14:sldId id="261"/>
@@ -157,7 +157,7 @@
             <p14:sldId id="269"/>
           </p14:sldIdLst>
         </p14:section>
-        <p14:section name="JIJ NU ! — Oefeningen" id="{e8b3d4c4-cb55-204f-a0b5-bf3ff42a351f}">
+        <p14:section name="JIJ NU ! — Oefeningen" id="{5a49e73c-9ad1-8fcf-fc49-ee35830642a8}">
           <p14:sldIdLst>
             <p14:sldId id="270"/>
             <p14:sldId id="271"/>
@@ -171,7 +171,7 @@
             <p14:sldId id="279"/>
           </p14:sldIdLst>
         </p14:section>
-        <p14:section name="Clôture" id="{cc4a3add-eec9-02a1-ce1c-e05e688cb5c7}">
+        <p14:section name="Clôture" id="{0bef16ab-7355-3ff7-696e-51bc4025cccb}">
           <p14:sldIdLst>
             <p14:sldId id="280"/>
           </p14:sldIdLst>
@@ -2457,7 +2457,7 @@
             <a:r>
               <a:rPr lang="en-US" dirty="0"/>
               <a:t>Objectif : Donner une vue d'ensemble avant le détail (reprise ordonnée du tableau de l'archive).
-Correction par rapport à l'archive : eeuw se prononce « é + ou », et non « é + u ». La coquille eeeuw est corrigée en eeuw (le siècle). Les repères français ne sont que des approximations : l'écoute de l'enseignant prime.</a:t>
+Correction par rapport à l'archive : eeuw se prononce « é + ou », et non « é + u ». La coquille eeeuw est corrigée en eeuw (le siècle). Précision : eu et oe s'écrivent avec deux lettres mais ne glissent pas. Ce sont des voyelles simples, pas des diphtongues. Ils sont travaillés ici à cause des confusions avec u / uu (diapos 8 et 9). Les repères français ne sont que des approximations : l'écoute de l'enseignant prime.</a:t>
             </a:r>
             <a:endParaRPr lang="en-US" dirty="0"/>
           </a:p>
@@ -3622,7 +3622,7 @@
                   <a:srgbClr val="FFFFFF"/>
                 </a:solidFill>
               </a:rPr>
-              <a:t>MODULE 6 / 10</a:t>
+              <a:t>MODULE 6 / 15</a:t>
             </a:r>
             <a:endParaRPr lang="en-US" sz="1400" dirty="0"/>
           </a:p>
@@ -9653,7 +9653,7 @@
                             <a:schemeClr val="tx1"/>
                           </a:solidFill>
                         </a:rPr>
-                        <a:t>≠ u</a:t>
+                        <a:t>≠ u · sans glissement</a:t>
                       </a:r>
                       <a:endParaRPr lang="en-US" sz="2000" dirty="0"/>
                     </a:p>
@@ -9899,7 +9899,7 @@
                             <a:schemeClr val="tx1"/>
                           </a:solidFill>
                         </a:rPr>
-                        <a:t>≠ u</a:t>
+                        <a:t>≠ u · sans glissement</a:t>
                       </a:r>
                       <a:endParaRPr lang="en-US" sz="2000" dirty="0"/>
                     </a:p>
@@ -31371,7 +31371,47 @@
       </p:sp>
       <p:sp>
         <p:nvSpPr>
-          <p:cNvPr id="20" name="Shape 14"/>
+          <p:cNvPr id="20" name="tag"/>
+          <p:cNvSpPr/>
+          <p:nvPr/>
+        </p:nvSpPr>
+        <p:spPr>
+          <a:xfrm>
+            <a:off x="5326380" y="1453896"/>
+            <a:ext cx="1714500" cy="237744"/>
+          </a:xfrm>
+          <a:prstGeom prst="roundRect">
+            <a:avLst>
+              <a:gd name="adj" fmla="val 19231"/>
+            </a:avLst>
+          </a:prstGeom>
+          <a:solidFill>
+            <a:schemeClr val="accent5"/>
+          </a:solidFill>
+          <a:ln/>
+        </p:spPr>
+        <p:txBody>
+          <a:bodyPr wrap="square" lIns="0" tIns="0" rIns="0" bIns="0" rtlCol="0" anchor="ctr"/>
+          <a:lstStyle/>
+          <a:p>
+            <a:pPr algn="ctr" indent="0" marL="0">
+              <a:buNone/>
+            </a:pPr>
+            <a:r>
+              <a:rPr lang="en-US" sz="1000" b="1" spc="100" kern="0" dirty="0">
+                <a:solidFill>
+                  <a:srgbClr val="FFFFFF"/>
+                </a:solidFill>
+              </a:rPr>
+              <a:t>sans glissement</a:t>
+            </a:r>
+            <a:endParaRPr lang="en-US" sz="1000" dirty="0"/>
+          </a:p>
+        </p:txBody>
+      </p:sp>
+      <p:sp>
+        <p:nvSpPr>
+          <p:cNvPr id="21" name="Shape 15"/>
           <p:cNvSpPr/>
           <p:nvPr/>
         </p:nvSpPr>
@@ -31405,7 +31445,7 @@
       </p:sp>
       <p:sp>
         <p:nvSpPr>
-          <p:cNvPr id="21" name="Text 15"/>
+          <p:cNvPr id="22" name="Text 16"/>
           <p:cNvSpPr txBox="1"/>
           <p:nvPr/>
         </p:nvSpPr>
@@ -31444,7 +31484,7 @@
       </p:sp>
       <p:sp>
         <p:nvSpPr>
-          <p:cNvPr id="22" name="Text 16"/>
+          <p:cNvPr id="23" name="Text 17"/>
           <p:cNvSpPr txBox="1"/>
           <p:nvPr/>
         </p:nvSpPr>
@@ -31480,7 +31520,7 @@
       </p:sp>
       <p:pic>
         <p:nvPicPr>
-          <p:cNvPr id="23" name="Image 3" descr="open book">    </p:cNvPr>
+          <p:cNvPr id="24" name="Image 3" descr="open book">    </p:cNvPr>
           <p:cNvPicPr>
             <a:picLocks noChangeAspect="1"/>
           </p:cNvPicPr>
@@ -31504,7 +31544,7 @@
       </p:pic>
       <p:sp>
         <p:nvSpPr>
-          <p:cNvPr id="24" name="Text 17"/>
+          <p:cNvPr id="25" name="Text 18"/>
           <p:cNvSpPr txBox="1"/>
           <p:nvPr/>
         </p:nvSpPr>
@@ -31540,7 +31580,47 @@
       </p:sp>
       <p:sp>
         <p:nvSpPr>
-          <p:cNvPr id="25" name="Shape 18"/>
+          <p:cNvPr id="26" name="tag"/>
+          <p:cNvSpPr/>
+          <p:nvPr/>
+        </p:nvSpPr>
+        <p:spPr>
+          <a:xfrm>
+            <a:off x="7581290" y="1453896"/>
+            <a:ext cx="1714500" cy="237744"/>
+          </a:xfrm>
+          <a:prstGeom prst="roundRect">
+            <a:avLst>
+              <a:gd name="adj" fmla="val 19231"/>
+            </a:avLst>
+          </a:prstGeom>
+          <a:solidFill>
+            <a:schemeClr val="accent5"/>
+          </a:solidFill>
+          <a:ln/>
+        </p:spPr>
+        <p:txBody>
+          <a:bodyPr wrap="square" lIns="0" tIns="0" rIns="0" bIns="0" rtlCol="0" anchor="ctr"/>
+          <a:lstStyle/>
+          <a:p>
+            <a:pPr algn="ctr" indent="0" marL="0">
+              <a:buNone/>
+            </a:pPr>
+            <a:r>
+              <a:rPr lang="en-US" sz="1000" b="1" spc="100" kern="0" dirty="0">
+                <a:solidFill>
+                  <a:srgbClr val="FFFFFF"/>
+                </a:solidFill>
+              </a:rPr>
+              <a:t>sans glissement</a:t>
+            </a:r>
+            <a:endParaRPr lang="en-US" sz="1000" dirty="0"/>
+          </a:p>
+        </p:txBody>
+      </p:sp>
+      <p:sp>
+        <p:nvSpPr>
+          <p:cNvPr id="27" name="Shape 20"/>
           <p:cNvSpPr/>
           <p:nvPr/>
         </p:nvSpPr>
@@ -31574,7 +31654,7 @@
       </p:sp>
       <p:sp>
         <p:nvSpPr>
-          <p:cNvPr id="26" name="Text 19"/>
+          <p:cNvPr id="28" name="Text 21"/>
           <p:cNvSpPr txBox="1"/>
           <p:nvPr/>
         </p:nvSpPr>
@@ -31613,7 +31693,7 @@
       </p:sp>
       <p:sp>
         <p:nvSpPr>
-          <p:cNvPr id="27" name="Text 20"/>
+          <p:cNvPr id="29" name="Text 22"/>
           <p:cNvSpPr txBox="1"/>
           <p:nvPr/>
         </p:nvSpPr>
@@ -31649,7 +31729,7 @@
       </p:sp>
       <p:pic>
         <p:nvPicPr>
-          <p:cNvPr id="28" name="Image 4" descr="woman">    </p:cNvPr>
+          <p:cNvPr id="30" name="Image 4" descr="woman">    </p:cNvPr>
           <p:cNvPicPr>
             <a:picLocks noChangeAspect="1"/>
           </p:cNvPicPr>
@@ -31673,7 +31753,7 @@
       </p:pic>
       <p:sp>
         <p:nvSpPr>
-          <p:cNvPr id="29" name="Text 21"/>
+          <p:cNvPr id="31" name="Text 23"/>
           <p:cNvSpPr txBox="1"/>
           <p:nvPr/>
         </p:nvSpPr>
@@ -31709,7 +31789,7 @@
       </p:sp>
       <p:sp>
         <p:nvSpPr>
-          <p:cNvPr id="30" name="Shape 22"/>
+          <p:cNvPr id="32" name="Shape 24"/>
           <p:cNvSpPr/>
           <p:nvPr/>
         </p:nvSpPr>
@@ -31743,7 +31823,7 @@
       </p:sp>
       <p:sp>
         <p:nvSpPr>
-          <p:cNvPr id="31" name="Text 23"/>
+          <p:cNvPr id="33" name="Text 25"/>
           <p:cNvSpPr txBox="1"/>
           <p:nvPr/>
         </p:nvSpPr>
@@ -31782,7 +31862,7 @@
       </p:sp>
       <p:sp>
         <p:nvSpPr>
-          <p:cNvPr id="32" name="Text 24"/>
+          <p:cNvPr id="34" name="Text 26"/>
           <p:cNvSpPr txBox="1"/>
           <p:nvPr/>
         </p:nvSpPr>
@@ -31818,7 +31898,7 @@
       </p:sp>
       <p:pic>
         <p:nvPicPr>
-          <p:cNvPr id="33" name="Image 5" descr="yawning face">    </p:cNvPr>
+          <p:cNvPr id="35" name="Image 5" descr="yawning face">    </p:cNvPr>
           <p:cNvPicPr>
             <a:picLocks noChangeAspect="1"/>
           </p:cNvPicPr>
@@ -31842,7 +31922,7 @@
       </p:pic>
       <p:sp>
         <p:nvSpPr>
-          <p:cNvPr id="34" name="Text 25"/>
+          <p:cNvPr id="36" name="Text 27"/>
           <p:cNvSpPr txBox="1"/>
           <p:nvPr/>
         </p:nvSpPr>
@@ -31878,7 +31958,7 @@
       </p:sp>
       <p:sp>
         <p:nvSpPr>
-          <p:cNvPr id="35" name="Shape 26"/>
+          <p:cNvPr id="37" name="Shape 28"/>
           <p:cNvSpPr/>
           <p:nvPr/>
         </p:nvSpPr>
@@ -31912,7 +31992,7 @@
       </p:sp>
       <p:sp>
         <p:nvSpPr>
-          <p:cNvPr id="36" name="Text 27"/>
+          <p:cNvPr id="38" name="Text 29"/>
           <p:cNvSpPr txBox="1"/>
           <p:nvPr/>
         </p:nvSpPr>
@@ -31951,7 +32031,7 @@
       </p:sp>
       <p:sp>
         <p:nvSpPr>
-          <p:cNvPr id="37" name="Text 28"/>
+          <p:cNvPr id="39" name="Text 30"/>
           <p:cNvSpPr txBox="1"/>
           <p:nvPr/>
         </p:nvSpPr>
@@ -31987,7 +32067,7 @@
       </p:sp>
       <p:pic>
         <p:nvPicPr>
-          <p:cNvPr id="38" name="Image 6" descr="sparkles">    </p:cNvPr>
+          <p:cNvPr id="40" name="Image 6" descr="sparkles">    </p:cNvPr>
           <p:cNvPicPr>
             <a:picLocks noChangeAspect="1"/>
           </p:cNvPicPr>
@@ -32011,7 +32091,7 @@
       </p:pic>
       <p:sp>
         <p:nvSpPr>
-          <p:cNvPr id="39" name="Text 29"/>
+          <p:cNvPr id="41" name="Text 31"/>
           <p:cNvSpPr txBox="1"/>
           <p:nvPr/>
         </p:nvSpPr>
@@ -32047,7 +32127,7 @@
       </p:sp>
       <p:sp>
         <p:nvSpPr>
-          <p:cNvPr id="40" name="Shape 30"/>
+          <p:cNvPr id="42" name="Shape 32"/>
           <p:cNvSpPr/>
           <p:nvPr/>
         </p:nvSpPr>
@@ -32081,7 +32161,7 @@
       </p:sp>
       <p:sp>
         <p:nvSpPr>
-          <p:cNvPr id="41" name="Text 31"/>
+          <p:cNvPr id="43" name="Text 33"/>
           <p:cNvSpPr txBox="1"/>
           <p:nvPr/>
         </p:nvSpPr>
@@ -32120,7 +32200,7 @@
       </p:sp>
       <p:sp>
         <p:nvSpPr>
-          <p:cNvPr id="42" name="Text 32"/>
+          <p:cNvPr id="44" name="Text 34"/>
           <p:cNvSpPr txBox="1"/>
           <p:nvPr/>
         </p:nvSpPr>
@@ -32156,7 +32236,7 @@
       </p:sp>
       <p:pic>
         <p:nvPicPr>
-          <p:cNvPr id="43" name="Image 7" descr="waving hand">    </p:cNvPr>
+          <p:cNvPr id="45" name="Image 7" descr="waving hand">    </p:cNvPr>
           <p:cNvPicPr>
             <a:picLocks noChangeAspect="1"/>
           </p:cNvPicPr>
@@ -32180,7 +32260,7 @@
       </p:pic>
       <p:sp>
         <p:nvSpPr>
-          <p:cNvPr id="44" name="Text 33"/>
+          <p:cNvPr id="46" name="Text 35"/>
           <p:cNvSpPr txBox="1"/>
           <p:nvPr/>
         </p:nvSpPr>
@@ -32216,7 +32296,7 @@
       </p:sp>
       <p:sp>
         <p:nvSpPr>
-          <p:cNvPr id="45" name="Shape 34"/>
+          <p:cNvPr id="47" name="Shape 36"/>
           <p:cNvSpPr/>
           <p:nvPr/>
         </p:nvSpPr>
@@ -32250,7 +32330,7 @@
       </p:sp>
       <p:sp>
         <p:nvSpPr>
-          <p:cNvPr id="46" name="Text 35"/>
+          <p:cNvPr id="48" name="Text 37"/>
           <p:cNvSpPr txBox="1"/>
           <p:nvPr/>
         </p:nvSpPr>
@@ -32289,7 +32369,7 @@
       </p:sp>
       <p:sp>
         <p:nvSpPr>
-          <p:cNvPr id="47" name="Text 36"/>
+          <p:cNvPr id="49" name="Text 38"/>
           <p:cNvSpPr txBox="1"/>
           <p:nvPr/>
         </p:nvSpPr>
@@ -32325,7 +32405,7 @@
       </p:sp>
       <p:pic>
         <p:nvPicPr>
-          <p:cNvPr id="48" name="Image 8" descr="snowflake">    </p:cNvPr>
+          <p:cNvPr id="50" name="Image 8" descr="snowflake">    </p:cNvPr>
           <p:cNvPicPr>
             <a:picLocks noChangeAspect="1"/>
           </p:cNvPicPr>
@@ -32349,7 +32429,7 @@
       </p:pic>
       <p:sp>
         <p:nvSpPr>
-          <p:cNvPr id="49" name="Text 37"/>
+          <p:cNvPr id="51" name="Text 39"/>
           <p:cNvSpPr txBox="1"/>
           <p:nvPr/>
         </p:nvSpPr>
@@ -32385,7 +32465,7 @@
       </p:sp>
       <p:sp>
         <p:nvSpPr>
-          <p:cNvPr id="50" name="Shape 38"/>
+          <p:cNvPr id="52" name="Shape 40"/>
           <p:cNvSpPr/>
           <p:nvPr/>
         </p:nvSpPr>
@@ -32419,7 +32499,7 @@
       </p:sp>
       <p:sp>
         <p:nvSpPr>
-          <p:cNvPr id="51" name="Text 39"/>
+          <p:cNvPr id="53" name="Text 41"/>
           <p:cNvSpPr txBox="1"/>
           <p:nvPr/>
         </p:nvSpPr>
@@ -32458,7 +32538,7 @@
       </p:sp>
       <p:sp>
         <p:nvSpPr>
-          <p:cNvPr id="52" name="Text 40"/>
+          <p:cNvPr id="54" name="Text 42"/>
           <p:cNvSpPr txBox="1"/>
           <p:nvPr/>
         </p:nvSpPr>
@@ -32494,7 +32574,7 @@
       </p:sp>
       <p:pic>
         <p:nvPicPr>
-          <p:cNvPr id="53" name="Image 9" descr="new button">    </p:cNvPr>
+          <p:cNvPr id="55" name="Image 9" descr="new button">    </p:cNvPr>
           <p:cNvPicPr>
             <a:picLocks noChangeAspect="1"/>
           </p:cNvPicPr>
@@ -32518,7 +32598,7 @@
       </p:pic>
       <p:sp>
         <p:nvSpPr>
-          <p:cNvPr id="54" name="Text 41"/>
+          <p:cNvPr id="56" name="Text 43"/>
           <p:cNvSpPr txBox="1"/>
           <p:nvPr/>
         </p:nvSpPr>
@@ -32554,7 +32634,7 @@
       </p:sp>
       <p:sp>
         <p:nvSpPr>
-          <p:cNvPr id="55" name="tag"/>
+          <p:cNvPr id="57" name="tag"/>
           <p:cNvSpPr/>
           <p:nvPr/>
         </p:nvSpPr>

--- a/neerlandais1/powerpoints/Module_6_Tweeklanken.pptx
+++ b/neerlandais1/powerpoints/Module_6_Tweeklanken.pptx
@@ -131,19 +131,19 @@
   <p:extLst>
     <p:ext uri="{521415D9-36F7-43E2-AB2F-B90AF26B5E84}">
       <p14:sectionLst xmlns:p14="http://schemas.microsoft.com/office/powerpoint/2010/main">
-        <p14:section name="Ouverture" id="{11d6150b-8985-1a71-c583-17166423d9a7}">
+        <p14:section name="Ouverture" id="{85b7a4f3-1626-84e7-5a68-eef854e425a0}">
           <p14:sldIdLst>
             <p14:sldId id="256"/>
           </p14:sldIdLst>
         </p14:section>
-        <p14:section name="Découvrir" id="{e046edac-dc46-d181-9f1b-a0725c2b09d4}">
+        <p14:section name="Découvrir" id="{f496c30b-6c80-5326-ecc0-5510ae241489}">
           <p14:sldIdLst>
             <p14:sldId id="257"/>
             <p14:sldId id="258"/>
             <p14:sldId id="259"/>
           </p14:sldIdLst>
         </p14:section>
-        <p14:section name="Comprendre" id="{827643fb-ee84-9b62-5f17-abf1cc59637f}">
+        <p14:section name="Comprendre" id="{08b12f4b-9365-70a9-4dc5-4d99c3a80908}">
           <p14:sldIdLst>
             <p14:sldId id="260"/>
             <p14:sldId id="261"/>
@@ -157,7 +157,7 @@
             <p14:sldId id="269"/>
           </p14:sldIdLst>
         </p14:section>
-        <p14:section name="JIJ NU ! — Oefeningen" id="{5a49e73c-9ad1-8fcf-fc49-ee35830642a8}">
+        <p14:section name="JIJ NU ! — Oefeningen" id="{a9f52228-3f6b-5687-63d1-da8c43e312ff}">
           <p14:sldIdLst>
             <p14:sldId id="270"/>
             <p14:sldId id="271"/>
@@ -171,7 +171,7 @@
             <p14:sldId id="279"/>
           </p14:sldIdLst>
         </p14:section>
-        <p14:section name="Clôture" id="{0bef16ab-7355-3ff7-696e-51bc4025cccb}">
+        <p14:section name="Clôture" id="{52a1544b-8f3f-41de-5573-bc56bf855ce0}">
           <p14:sldIdLst>
             <p14:sldId id="280"/>
           </p14:sldIdLst>
@@ -3622,7 +3622,7 @@
                   <a:srgbClr val="FFFFFF"/>
                 </a:solidFill>
               </a:rPr>
-              <a:t>MODULE 6 / 15</a:t>
+              <a:t>MODULE 6 / 19</a:t>
             </a:r>
             <a:endParaRPr lang="en-US" sz="1400" dirty="0"/>
           </a:p>

--- a/neerlandais1/powerpoints/Module_6_Tweeklanken.pptx
+++ b/neerlandais1/powerpoints/Module_6_Tweeklanken.pptx
@@ -131,19 +131,19 @@
   <p:extLst>
     <p:ext uri="{521415D9-36F7-43E2-AB2F-B90AF26B5E84}">
       <p14:sectionLst xmlns:p14="http://schemas.microsoft.com/office/powerpoint/2010/main">
-        <p14:section name="Ouverture" id="{85b7a4f3-1626-84e7-5a68-eef854e425a0}">
+        <p14:section name="Ouverture" id="{2259e37a-45da-fd57-4249-763f8bf94b1d}">
           <p14:sldIdLst>
             <p14:sldId id="256"/>
           </p14:sldIdLst>
         </p14:section>
-        <p14:section name="Découvrir" id="{f496c30b-6c80-5326-ecc0-5510ae241489}">
+        <p14:section name="Découvrir" id="{d0df0690-e378-2ecd-7ba0-6747c42f6266}">
           <p14:sldIdLst>
             <p14:sldId id="257"/>
             <p14:sldId id="258"/>
             <p14:sldId id="259"/>
           </p14:sldIdLst>
         </p14:section>
-        <p14:section name="Comprendre" id="{08b12f4b-9365-70a9-4dc5-4d99c3a80908}">
+        <p14:section name="Comprendre" id="{f325310b-0ed1-dae6-4266-66ac1b72b5e8}">
           <p14:sldIdLst>
             <p14:sldId id="260"/>
             <p14:sldId id="261"/>
@@ -157,7 +157,7 @@
             <p14:sldId id="269"/>
           </p14:sldIdLst>
         </p14:section>
-        <p14:section name="JIJ NU ! — Oefeningen" id="{a9f52228-3f6b-5687-63d1-da8c43e312ff}">
+        <p14:section name="JIJ NU ! — Oefeningen" id="{23bbec06-7603-8c34-d353-7ea78861b840}">
           <p14:sldIdLst>
             <p14:sldId id="270"/>
             <p14:sldId id="271"/>
@@ -171,7 +171,7 @@
             <p14:sldId id="279"/>
           </p14:sldIdLst>
         </p14:section>
-        <p14:section name="Clôture" id="{52a1544b-8f3f-41de-5573-bc56bf855ce0}">
+        <p14:section name="Clôture" id="{0a717a75-1f7e-0719-dc92-a183b0d0f002}">
           <p14:sldIdLst>
             <p14:sldId id="280"/>
           </p14:sldIdLst>
@@ -3622,7 +3622,7 @@
                   <a:srgbClr val="FFFFFF"/>
                 </a:solidFill>
               </a:rPr>
-              <a:t>MODULE 6 / 19</a:t>
+              <a:t>MODULE 6 / 24</a:t>
             </a:r>
             <a:endParaRPr lang="en-US" sz="1400" dirty="0"/>
           </a:p>

--- a/neerlandais1/powerpoints/Module_6_Tweeklanken.pptx
+++ b/neerlandais1/powerpoints/Module_6_Tweeklanken.pptx
@@ -131,19 +131,19 @@
   <p:extLst>
     <p:ext uri="{521415D9-36F7-43E2-AB2F-B90AF26B5E84}">
       <p14:sectionLst xmlns:p14="http://schemas.microsoft.com/office/powerpoint/2010/main">
-        <p14:section name="Ouverture" id="{2259e37a-45da-fd57-4249-763f8bf94b1d}">
+        <p14:section name="Ouverture" id="{b2104210-291d-aedd-4172-17c4201b768f}">
           <p14:sldIdLst>
             <p14:sldId id="256"/>
           </p14:sldIdLst>
         </p14:section>
-        <p14:section name="Découvrir" id="{d0df0690-e378-2ecd-7ba0-6747c42f6266}">
+        <p14:section name="Découvrir" id="{e5b3322b-b9a7-74ba-476e-88f6875546b4}">
           <p14:sldIdLst>
             <p14:sldId id="257"/>
             <p14:sldId id="258"/>
             <p14:sldId id="259"/>
           </p14:sldIdLst>
         </p14:section>
-        <p14:section name="Comprendre" id="{f325310b-0ed1-dae6-4266-66ac1b72b5e8}">
+        <p14:section name="Comprendre" id="{dfeb0aab-8ced-1a9f-ea69-d04b6b0e6abe}">
           <p14:sldIdLst>
             <p14:sldId id="260"/>
             <p14:sldId id="261"/>
@@ -157,7 +157,7 @@
             <p14:sldId id="269"/>
           </p14:sldIdLst>
         </p14:section>
-        <p14:section name="JIJ NU ! — Oefeningen" id="{23bbec06-7603-8c34-d353-7ea78861b840}">
+        <p14:section name="JIJ NU ! — Oefeningen" id="{1dc21f92-c72a-a0f0-8ac8-a29ef70faff2}">
           <p14:sldIdLst>
             <p14:sldId id="270"/>
             <p14:sldId id="271"/>
@@ -171,7 +171,7 @@
             <p14:sldId id="279"/>
           </p14:sldIdLst>
         </p14:section>
-        <p14:section name="Clôture" id="{0a717a75-1f7e-0719-dc92-a183b0d0f002}">
+        <p14:section name="Clôture" id="{5f1ad1ea-d9a1-7b9d-313f-7472816b3469}">
           <p14:sldIdLst>
             <p14:sldId id="280"/>
           </p14:sldIdLst>
@@ -3622,7 +3622,7 @@
                   <a:srgbClr val="FFFFFF"/>
                 </a:solidFill>
               </a:rPr>
-              <a:t>MODULE 6 / 24</a:t>
+              <a:t>MODULE 6 / 29</a:t>
             </a:r>
             <a:endParaRPr lang="en-US" sz="1400" dirty="0"/>
           </a:p>

--- a/neerlandais1/powerpoints/Module_6_Tweeklanken.pptx
+++ b/neerlandais1/powerpoints/Module_6_Tweeklanken.pptx
@@ -131,19 +131,19 @@
   <p:extLst>
     <p:ext uri="{521415D9-36F7-43E2-AB2F-B90AF26B5E84}">
       <p14:sectionLst xmlns:p14="http://schemas.microsoft.com/office/powerpoint/2010/main">
-        <p14:section name="Ouverture" id="{b2104210-291d-aedd-4172-17c4201b768f}">
+        <p14:section name="Ouverture" id="{7aad1df7-5a6a-7e7d-8f30-e04dabd0566b}">
           <p14:sldIdLst>
             <p14:sldId id="256"/>
           </p14:sldIdLst>
         </p14:section>
-        <p14:section name="Découvrir" id="{e5b3322b-b9a7-74ba-476e-88f6875546b4}">
+        <p14:section name="Découvrir" id="{ed2bc513-f92b-0644-71e6-6bf1fc2ed169}">
           <p14:sldIdLst>
             <p14:sldId id="257"/>
             <p14:sldId id="258"/>
             <p14:sldId id="259"/>
           </p14:sldIdLst>
         </p14:section>
-        <p14:section name="Comprendre" id="{dfeb0aab-8ced-1a9f-ea69-d04b6b0e6abe}">
+        <p14:section name="Comprendre" id="{53d3e89f-638c-80ce-89cf-42e108dae112}">
           <p14:sldIdLst>
             <p14:sldId id="260"/>
             <p14:sldId id="261"/>
@@ -157,7 +157,7 @@
             <p14:sldId id="269"/>
           </p14:sldIdLst>
         </p14:section>
-        <p14:section name="JIJ NU ! — Oefeningen" id="{1dc21f92-c72a-a0f0-8ac8-a29ef70faff2}">
+        <p14:section name="JIJ NU ! — Oefeningen" id="{60f8120f-0293-7794-19c8-1d7f83a884d4}">
           <p14:sldIdLst>
             <p14:sldId id="270"/>
             <p14:sldId id="271"/>
@@ -171,7 +171,7 @@
             <p14:sldId id="279"/>
           </p14:sldIdLst>
         </p14:section>
-        <p14:section name="Clôture" id="{5f1ad1ea-d9a1-7b9d-313f-7472816b3469}">
+        <p14:section name="Clôture" id="{e96bf786-929c-8020-d468-486f46c3c6a3}">
           <p14:sldIdLst>
             <p14:sldId id="280"/>
           </p14:sldIdLst>
@@ -3622,7 +3622,7 @@
                   <a:srgbClr val="FFFFFF"/>
                 </a:solidFill>
               </a:rPr>
-              <a:t>MODULE 6 / 29</a:t>
+              <a:t>MODULE 6 / 32</a:t>
             </a:r>
             <a:endParaRPr lang="en-US" sz="1400" dirty="0"/>
           </a:p>

--- a/neerlandais1/powerpoints/Module_6_Tweeklanken.pptx
+++ b/neerlandais1/powerpoints/Module_6_Tweeklanken.pptx
@@ -131,19 +131,19 @@
   <p:extLst>
     <p:ext uri="{521415D9-36F7-43E2-AB2F-B90AF26B5E84}">
       <p14:sectionLst xmlns:p14="http://schemas.microsoft.com/office/powerpoint/2010/main">
-        <p14:section name="Ouverture" id="{7aad1df7-5a6a-7e7d-8f30-e04dabd0566b}">
+        <p14:section name="Ouverture" id="{089e0c0d-6bbb-ab96-3ce2-a61c87b2a7d1}">
           <p14:sldIdLst>
             <p14:sldId id="256"/>
           </p14:sldIdLst>
         </p14:section>
-        <p14:section name="Découvrir" id="{ed2bc513-f92b-0644-71e6-6bf1fc2ed169}">
+        <p14:section name="Découvrir" id="{10f78c29-866e-2ca7-b08e-7c69c7203fc9}">
           <p14:sldIdLst>
             <p14:sldId id="257"/>
             <p14:sldId id="258"/>
             <p14:sldId id="259"/>
           </p14:sldIdLst>
         </p14:section>
-        <p14:section name="Comprendre" id="{53d3e89f-638c-80ce-89cf-42e108dae112}">
+        <p14:section name="Comprendre" id="{fe8f9838-5bd0-06e9-6c92-222e8c2fba29}">
           <p14:sldIdLst>
             <p14:sldId id="260"/>
             <p14:sldId id="261"/>
@@ -157,7 +157,7 @@
             <p14:sldId id="269"/>
           </p14:sldIdLst>
         </p14:section>
-        <p14:section name="JIJ NU ! — Oefeningen" id="{60f8120f-0293-7794-19c8-1d7f83a884d4}">
+        <p14:section name="JIJ NU ! — Oefeningen" id="{ee29870a-a739-b0b4-7c46-5060dfc44892}">
           <p14:sldIdLst>
             <p14:sldId id="270"/>
             <p14:sldId id="271"/>
@@ -171,7 +171,7 @@
             <p14:sldId id="279"/>
           </p14:sldIdLst>
         </p14:section>
-        <p14:section name="Clôture" id="{e96bf786-929c-8020-d468-486f46c3c6a3}">
+        <p14:section name="Clôture" id="{540b400e-cf68-85f7-b4ab-d7bab415ef19}">
           <p14:sldIdLst>
             <p14:sldId id="280"/>
           </p14:sldIdLst>

--- a/neerlandais1/powerpoints/Module_6_Tweeklanken.pptx
+++ b/neerlandais1/powerpoints/Module_6_Tweeklanken.pptx
@@ -131,19 +131,19 @@
   <p:extLst>
     <p:ext uri="{521415D9-36F7-43E2-AB2F-B90AF26B5E84}">
       <p14:sectionLst xmlns:p14="http://schemas.microsoft.com/office/powerpoint/2010/main">
-        <p14:section name="Ouverture" id="{089e0c0d-6bbb-ab96-3ce2-a61c87b2a7d1}">
+        <p14:section name="Ouverture" id="{9d26e650-d61a-6da2-be3b-9ccfb71eacd6}">
           <p14:sldIdLst>
             <p14:sldId id="256"/>
           </p14:sldIdLst>
         </p14:section>
-        <p14:section name="Découvrir" id="{10f78c29-866e-2ca7-b08e-7c69c7203fc9}">
+        <p14:section name="Découvrir" id="{24d19913-33f4-cc16-a21b-10cd9737b5b8}">
           <p14:sldIdLst>
             <p14:sldId id="257"/>
             <p14:sldId id="258"/>
             <p14:sldId id="259"/>
           </p14:sldIdLst>
         </p14:section>
-        <p14:section name="Comprendre" id="{fe8f9838-5bd0-06e9-6c92-222e8c2fba29}">
+        <p14:section name="Comprendre" id="{5461bdf3-b62c-1ec0-78b3-909a3bfc2c65}">
           <p14:sldIdLst>
             <p14:sldId id="260"/>
             <p14:sldId id="261"/>
@@ -157,7 +157,7 @@
             <p14:sldId id="269"/>
           </p14:sldIdLst>
         </p14:section>
-        <p14:section name="JIJ NU ! — Oefeningen" id="{ee29870a-a739-b0b4-7c46-5060dfc44892}">
+        <p14:section name="JIJ NU ! — Oefeningen" id="{51fcfe15-da12-1214-f78f-5eaeee8d8525}">
           <p14:sldIdLst>
             <p14:sldId id="270"/>
             <p14:sldId id="271"/>
@@ -171,7 +171,7 @@
             <p14:sldId id="279"/>
           </p14:sldIdLst>
         </p14:section>
-        <p14:section name="Clôture" id="{540b400e-cf68-85f7-b4ab-d7bab415ef19}">
+        <p14:section name="Clôture" id="{f1d8d950-a4f2-b236-3208-a6c475bf2bbe}">
           <p14:sldIdLst>
             <p14:sldId id="280"/>
           </p14:sldIdLst>

--- a/neerlandais1/powerpoints/Module_6_Tweeklanken.pptx
+++ b/neerlandais1/powerpoints/Module_6_Tweeklanken.pptx
@@ -131,19 +131,19 @@
   <p:extLst>
     <p:ext uri="{521415D9-36F7-43E2-AB2F-B90AF26B5E84}">
       <p14:sectionLst xmlns:p14="http://schemas.microsoft.com/office/powerpoint/2010/main">
-        <p14:section name="Ouverture" id="{9d26e650-d61a-6da2-be3b-9ccfb71eacd6}">
+        <p14:section name="Ouverture" id="{15859303-969b-4f22-9f7d-c75e10d18f20}">
           <p14:sldIdLst>
             <p14:sldId id="256"/>
           </p14:sldIdLst>
         </p14:section>
-        <p14:section name="Découvrir" id="{24d19913-33f4-cc16-a21b-10cd9737b5b8}">
+        <p14:section name="Découvrir" id="{c580a583-a488-36c4-53b0-24657aa2e7b7}">
           <p14:sldIdLst>
             <p14:sldId id="257"/>
             <p14:sldId id="258"/>
             <p14:sldId id="259"/>
           </p14:sldIdLst>
         </p14:section>
-        <p14:section name="Comprendre" id="{5461bdf3-b62c-1ec0-78b3-909a3bfc2c65}">
+        <p14:section name="Comprendre" id="{ed1ee2a5-bd8e-338e-dc39-a3df6eb7a6ec}">
           <p14:sldIdLst>
             <p14:sldId id="260"/>
             <p14:sldId id="261"/>
@@ -157,7 +157,7 @@
             <p14:sldId id="269"/>
           </p14:sldIdLst>
         </p14:section>
-        <p14:section name="JIJ NU ! — Oefeningen" id="{51fcfe15-da12-1214-f78f-5eaeee8d8525}">
+        <p14:section name="JIJ NU ! — Oefeningen" id="{63c728a5-4979-9bb8-3ccb-bfee7aa46cb5}">
           <p14:sldIdLst>
             <p14:sldId id="270"/>
             <p14:sldId id="271"/>
@@ -171,7 +171,7 @@
             <p14:sldId id="279"/>
           </p14:sldIdLst>
         </p14:section>
-        <p14:section name="Clôture" id="{f1d8d950-a4f2-b236-3208-a6c475bf2bbe}">
+        <p14:section name="Clôture" id="{ad7c0b67-9163-0ed4-819f-0a343669c796}">
           <p14:sldIdLst>
             <p14:sldId id="280"/>
           </p14:sldIdLst>

--- a/neerlandais1/powerpoints/Module_6_Tweeklanken.pptx
+++ b/neerlandais1/powerpoints/Module_6_Tweeklanken.pptx
@@ -131,19 +131,19 @@
   <p:extLst>
     <p:ext uri="{521415D9-36F7-43E2-AB2F-B90AF26B5E84}">
       <p14:sectionLst xmlns:p14="http://schemas.microsoft.com/office/powerpoint/2010/main">
-        <p14:section name="Ouverture" id="{15859303-969b-4f22-9f7d-c75e10d18f20}">
+        <p14:section name="Ouverture" id="{5de75c01-633d-4849-f3dd-63facea23d51}">
           <p14:sldIdLst>
             <p14:sldId id="256"/>
           </p14:sldIdLst>
         </p14:section>
-        <p14:section name="Découvrir" id="{c580a583-a488-36c4-53b0-24657aa2e7b7}">
+        <p14:section name="Découvrir" id="{053c5f25-ea82-31ba-f5c5-afca17808a23}">
           <p14:sldIdLst>
             <p14:sldId id="257"/>
             <p14:sldId id="258"/>
             <p14:sldId id="259"/>
           </p14:sldIdLst>
         </p14:section>
-        <p14:section name="Comprendre" id="{ed1ee2a5-bd8e-338e-dc39-a3df6eb7a6ec}">
+        <p14:section name="Comprendre" id="{a5777e02-fcc3-771e-5c14-129fe5f2779f}">
           <p14:sldIdLst>
             <p14:sldId id="260"/>
             <p14:sldId id="261"/>
@@ -157,7 +157,7 @@
             <p14:sldId id="269"/>
           </p14:sldIdLst>
         </p14:section>
-        <p14:section name="JIJ NU ! — Oefeningen" id="{63c728a5-4979-9bb8-3ccb-bfee7aa46cb5}">
+        <p14:section name="JIJ NU ! — Oefeningen" id="{af460c98-e638-5d8d-9974-b6442c34c6b9}">
           <p14:sldIdLst>
             <p14:sldId id="270"/>
             <p14:sldId id="271"/>
@@ -171,7 +171,7 @@
             <p14:sldId id="279"/>
           </p14:sldIdLst>
         </p14:section>
-        <p14:section name="Clôture" id="{ad7c0b67-9163-0ed4-819f-0a343669c796}">
+        <p14:section name="Clôture" id="{063ea495-7fa5-1a23-e96d-df5bdcff568d}">
           <p14:sldIdLst>
             <p14:sldId id="280"/>
           </p14:sldIdLst>

--- a/neerlandais1/powerpoints/Module_6_Tweeklanken.pptx
+++ b/neerlandais1/powerpoints/Module_6_Tweeklanken.pptx
@@ -131,19 +131,19 @@
   <p:extLst>
     <p:ext uri="{521415D9-36F7-43E2-AB2F-B90AF26B5E84}">
       <p14:sectionLst xmlns:p14="http://schemas.microsoft.com/office/powerpoint/2010/main">
-        <p14:section name="Ouverture" id="{5de75c01-633d-4849-f3dd-63facea23d51}">
+        <p14:section name="Ouverture" id="{6bd04362-6649-a996-c08f-5af796723887}">
           <p14:sldIdLst>
             <p14:sldId id="256"/>
           </p14:sldIdLst>
         </p14:section>
-        <p14:section name="Découvrir" id="{053c5f25-ea82-31ba-f5c5-afca17808a23}">
+        <p14:section name="Découvrir" id="{6b2e9aa1-bd62-3773-4729-1e5449cc64f3}">
           <p14:sldIdLst>
             <p14:sldId id="257"/>
             <p14:sldId id="258"/>
             <p14:sldId id="259"/>
           </p14:sldIdLst>
         </p14:section>
-        <p14:section name="Comprendre" id="{a5777e02-fcc3-771e-5c14-129fe5f2779f}">
+        <p14:section name="Comprendre" id="{1766c151-df24-f67e-1e5c-b0364460c913}">
           <p14:sldIdLst>
             <p14:sldId id="260"/>
             <p14:sldId id="261"/>
@@ -157,7 +157,7 @@
             <p14:sldId id="269"/>
           </p14:sldIdLst>
         </p14:section>
-        <p14:section name="JIJ NU ! — Oefeningen" id="{af460c98-e638-5d8d-9974-b6442c34c6b9}">
+        <p14:section name="JIJ NU ! — Oefeningen" id="{5b8e25a5-9798-c5bb-a211-c329fbc22d81}">
           <p14:sldIdLst>
             <p14:sldId id="270"/>
             <p14:sldId id="271"/>
@@ -171,7 +171,7 @@
             <p14:sldId id="279"/>
           </p14:sldIdLst>
         </p14:section>
-        <p14:section name="Clôture" id="{063ea495-7fa5-1a23-e96d-df5bdcff568d}">
+        <p14:section name="Clôture" id="{7a567a51-4ca4-5d4c-23d2-f27ddf84ee1e}">
           <p14:sldIdLst>
             <p14:sldId id="280"/>
           </p14:sldIdLst>

--- a/neerlandais1/powerpoints/Module_6_Tweeklanken.pptx
+++ b/neerlandais1/powerpoints/Module_6_Tweeklanken.pptx
@@ -131,19 +131,19 @@
   <p:extLst>
     <p:ext uri="{521415D9-36F7-43E2-AB2F-B90AF26B5E84}">
       <p14:sectionLst xmlns:p14="http://schemas.microsoft.com/office/powerpoint/2010/main">
-        <p14:section name="Ouverture" id="{6bd04362-6649-a996-c08f-5af796723887}">
+        <p14:section name="Ouverture" id="{96573a54-7e00-478a-2353-373e130a0307}">
           <p14:sldIdLst>
             <p14:sldId id="256"/>
           </p14:sldIdLst>
         </p14:section>
-        <p14:section name="Découvrir" id="{6b2e9aa1-bd62-3773-4729-1e5449cc64f3}">
+        <p14:section name="Découvrir" id="{d313bf39-1b3d-8e10-c911-7c6b2e7a1b11}">
           <p14:sldIdLst>
             <p14:sldId id="257"/>
             <p14:sldId id="258"/>
             <p14:sldId id="259"/>
           </p14:sldIdLst>
         </p14:section>
-        <p14:section name="Comprendre" id="{1766c151-df24-f67e-1e5c-b0364460c913}">
+        <p14:section name="Comprendre" id="{0cf1f667-a061-27c6-7cfc-b2d57ec6b4d3}">
           <p14:sldIdLst>
             <p14:sldId id="260"/>
             <p14:sldId id="261"/>
@@ -157,7 +157,7 @@
             <p14:sldId id="269"/>
           </p14:sldIdLst>
         </p14:section>
-        <p14:section name="JIJ NU ! — Oefeningen" id="{5b8e25a5-9798-c5bb-a211-c329fbc22d81}">
+        <p14:section name="JIJ NU ! — Oefeningen" id="{d4550552-ba07-14ab-deb9-11882646d6d8}">
           <p14:sldIdLst>
             <p14:sldId id="270"/>
             <p14:sldId id="271"/>
@@ -171,7 +171,7 @@
             <p14:sldId id="279"/>
           </p14:sldIdLst>
         </p14:section>
-        <p14:section name="Clôture" id="{7a567a51-4ca4-5d4c-23d2-f27ddf84ee1e}">
+        <p14:section name="Clôture" id="{b1ece286-86d0-627f-eb05-621b5fedfbc2}">
           <p14:sldIdLst>
             <p14:sldId id="280"/>
           </p14:sldIdLst>

--- a/neerlandais1/powerpoints/Module_6_Tweeklanken.pptx
+++ b/neerlandais1/powerpoints/Module_6_Tweeklanken.pptx
@@ -131,19 +131,19 @@
   <p:extLst>
     <p:ext uri="{521415D9-36F7-43E2-AB2F-B90AF26B5E84}">
       <p14:sectionLst xmlns:p14="http://schemas.microsoft.com/office/powerpoint/2010/main">
-        <p14:section name="Ouverture" id="{96573a54-7e00-478a-2353-373e130a0307}">
+        <p14:section name="Ouverture" id="{3e2aef15-bdec-b713-b237-4d40f0216228}">
           <p14:sldIdLst>
             <p14:sldId id="256"/>
           </p14:sldIdLst>
         </p14:section>
-        <p14:section name="Découvrir" id="{d313bf39-1b3d-8e10-c911-7c6b2e7a1b11}">
+        <p14:section name="Découvrir" id="{c09b2730-ef84-c042-dd82-cffec6db2305}">
           <p14:sldIdLst>
             <p14:sldId id="257"/>
             <p14:sldId id="258"/>
             <p14:sldId id="259"/>
           </p14:sldIdLst>
         </p14:section>
-        <p14:section name="Comprendre" id="{0cf1f667-a061-27c6-7cfc-b2d57ec6b4d3}">
+        <p14:section name="Comprendre" id="{f2a4b82d-3553-69bc-56fc-822dbe9acbe8}">
           <p14:sldIdLst>
             <p14:sldId id="260"/>
             <p14:sldId id="261"/>
@@ -157,7 +157,7 @@
             <p14:sldId id="269"/>
           </p14:sldIdLst>
         </p14:section>
-        <p14:section name="JIJ NU ! — Oefeningen" id="{d4550552-ba07-14ab-deb9-11882646d6d8}">
+        <p14:section name="JIJ NU ! — Oefeningen" id="{aa6ee289-661f-924f-d76e-12915c5337ac}">
           <p14:sldIdLst>
             <p14:sldId id="270"/>
             <p14:sldId id="271"/>
@@ -171,7 +171,7 @@
             <p14:sldId id="279"/>
           </p14:sldIdLst>
         </p14:section>
-        <p14:section name="Clôture" id="{b1ece286-86d0-627f-eb05-621b5fedfbc2}">
+        <p14:section name="Clôture" id="{9514f431-6440-03f8-e03d-b5eea3808a33}">
           <p14:sldIdLst>
             <p14:sldId id="280"/>
           </p14:sldIdLst>

--- a/neerlandais1/powerpoints/Module_6_Tweeklanken.pptx
+++ b/neerlandais1/powerpoints/Module_6_Tweeklanken.pptx
@@ -131,19 +131,19 @@
   <p:extLst>
     <p:ext uri="{521415D9-36F7-43E2-AB2F-B90AF26B5E84}">
       <p14:sectionLst xmlns:p14="http://schemas.microsoft.com/office/powerpoint/2010/main">
-        <p14:section name="Ouverture" id="{3e2aef15-bdec-b713-b237-4d40f0216228}">
+        <p14:section name="Ouverture" id="{e0aab37b-74dd-a392-ba3a-1a8bc05089aa}">
           <p14:sldIdLst>
             <p14:sldId id="256"/>
           </p14:sldIdLst>
         </p14:section>
-        <p14:section name="Découvrir" id="{c09b2730-ef84-c042-dd82-cffec6db2305}">
+        <p14:section name="Découvrir" id="{8ada07ee-d27b-ba19-0df9-1b1dc4244f2f}">
           <p14:sldIdLst>
             <p14:sldId id="257"/>
             <p14:sldId id="258"/>
             <p14:sldId id="259"/>
           </p14:sldIdLst>
         </p14:section>
-        <p14:section name="Comprendre" id="{f2a4b82d-3553-69bc-56fc-822dbe9acbe8}">
+        <p14:section name="Comprendre" id="{db4e89bc-5a6a-7b00-f5d9-3b0e71c9e29d}">
           <p14:sldIdLst>
             <p14:sldId id="260"/>
             <p14:sldId id="261"/>
@@ -157,7 +157,7 @@
             <p14:sldId id="269"/>
           </p14:sldIdLst>
         </p14:section>
-        <p14:section name="JIJ NU ! — Oefeningen" id="{aa6ee289-661f-924f-d76e-12915c5337ac}">
+        <p14:section name="JIJ NU ! — Oefeningen" id="{14f79354-2d81-4035-94ef-c4696989f2a4}">
           <p14:sldIdLst>
             <p14:sldId id="270"/>
             <p14:sldId id="271"/>
@@ -171,7 +171,7 @@
             <p14:sldId id="279"/>
           </p14:sldIdLst>
         </p14:section>
-        <p14:section name="Clôture" id="{9514f431-6440-03f8-e03d-b5eea3808a33}">
+        <p14:section name="Clôture" id="{133f523b-4baa-6d7f-65dd-434794d7177d}">
           <p14:sldIdLst>
             <p14:sldId id="280"/>
           </p14:sldIdLst>
